--- a/slides/04_local_search.pptx
+++ b/slides/04_local_search.pptx
@@ -3108,7 +3108,7 @@
             <a:fld id="{46E2045A-045A-4BC7-A4D3-1395440B1C3D}" type="datetimeFigureOut">
               <a:rPr lang="en-US" smtClean="0"/>
               <a:pPr/>
-              <a:t>10/7/2025</a:t>
+              <a:t>2/27/2026</a:t>
             </a:fld>
             <a:endParaRPr lang="en-US"/>
           </a:p>
@@ -9980,8 +9980,8 @@
           </a:p>
         </p:txBody>
       </p:sp>
-      <mc:AlternateContent xmlns:mc="http://schemas.openxmlformats.org/markup-compatibility/2006" xmlns:a14="http://schemas.microsoft.com/office/drawing/2010/main">
-        <mc:Choice Requires="a14">
+      <mc:AlternateContent xmlns:mc="http://schemas.openxmlformats.org/markup-compatibility/2006">
+        <mc:Choice xmlns:a14="http://schemas.microsoft.com/office/drawing/2010/main" Requires="a14">
           <p:sp>
             <p:nvSpPr>
               <p:cNvPr id="7" name="Rectangle 3">
@@ -10285,7 +10285,13 @@
                           <a:rPr lang="en-US" sz="2000" b="0" i="0" smtClean="0">
                             <a:latin typeface="Cambria Math" panose="02040503050406030204" pitchFamily="18" charset="0"/>
                           </a:rPr>
-                          <m:t>argmin</m:t>
+                          <m:t>argm</m:t>
+                        </m:r>
+                        <m:r>
+                          <a:rPr lang="en-US" sz="2000" b="0" i="1" smtClean="0">
+                            <a:latin typeface="Cambria Math" panose="02040503050406030204" pitchFamily="18" charset="0"/>
+                          </a:rPr>
+                          <m:t>𝑎𝑥</m:t>
                         </m:r>
                       </m:e>
                       <m:sub>
@@ -10304,8 +10310,9 @@
                         <m:r>
                           <a:rPr lang="en-US" sz="2000" b="0" i="1" smtClean="0">
                             <a:latin typeface="Cambria Math" panose="02040503050406030204" pitchFamily="18" charset="0"/>
+                            <a:ea typeface="Cambria Math" panose="02040503050406030204" pitchFamily="18" charset="0"/>
                           </a:rPr>
-                          <m:t>𝑆</m:t>
+                          <m:t>𝒮</m:t>
                         </m:r>
                         <m:r>
                           <a:rPr lang="en-US" sz="2000" b="0" i="1" smtClean="0">
@@ -10321,33 +10328,49 @@
                       </a:rPr>
                       <m:t> </m:t>
                     </m:r>
-                    <m:r>
-                      <m:rPr>
-                        <m:sty m:val="p"/>
-                      </m:rPr>
-                      <a:rPr lang="en-US" sz="2000">
-                        <a:latin typeface="Cambria Math" panose="02040503050406030204" pitchFamily="18" charset="0"/>
-                      </a:rPr>
-                      <m:t>conflicts</m:t>
-                    </m:r>
-                    <m:r>
-                      <a:rPr lang="en-US" sz="2000" b="0" i="1" smtClean="0">
-                        <a:latin typeface="Cambria Math" panose="02040503050406030204" pitchFamily="18" charset="0"/>
-                      </a:rPr>
-                      <m:t>(</m:t>
-                    </m:r>
-                    <m:r>
-                      <a:rPr lang="en-US" sz="2000" b="0" i="1" smtClean="0">
-                        <a:latin typeface="Cambria Math" panose="02040503050406030204" pitchFamily="18" charset="0"/>
-                      </a:rPr>
-                      <m:t>𝑠</m:t>
-                    </m:r>
-                    <m:r>
-                      <a:rPr lang="en-US" sz="2000" b="0" i="1" smtClean="0">
-                        <a:latin typeface="Cambria Math" panose="02040503050406030204" pitchFamily="18" charset="0"/>
-                      </a:rPr>
-                      <m:t>)</m:t>
-                    </m:r>
+                    <m:d>
+                      <m:dPr>
+                        <m:ctrlPr>
+                          <a:rPr lang="en-US" sz="2000" b="0" i="1" smtClean="0">
+                            <a:latin typeface="Cambria Math" panose="02040503050406030204" pitchFamily="18" charset="0"/>
+                          </a:rPr>
+                        </m:ctrlPr>
+                      </m:dPr>
+                      <m:e>
+                        <m:r>
+                          <a:rPr lang="en-US" sz="2000">
+                            <a:latin typeface="Cambria Math" panose="02040503050406030204" pitchFamily="18" charset="0"/>
+                          </a:rPr>
+                          <m:t>−</m:t>
+                        </m:r>
+                        <m:r>
+                          <m:rPr>
+                            <m:sty m:val="p"/>
+                          </m:rPr>
+                          <a:rPr lang="en-US" sz="2000">
+                            <a:latin typeface="Cambria Math" panose="02040503050406030204" pitchFamily="18" charset="0"/>
+                          </a:rPr>
+                          <m:t>conflicts</m:t>
+                        </m:r>
+                        <m:d>
+                          <m:dPr>
+                            <m:ctrlPr>
+                              <a:rPr lang="en-US" sz="2000" i="1">
+                                <a:latin typeface="Cambria Math" panose="02040503050406030204" pitchFamily="18" charset="0"/>
+                              </a:rPr>
+                            </m:ctrlPr>
+                          </m:dPr>
+                          <m:e>
+                            <m:r>
+                              <a:rPr lang="en-US" sz="2000" i="1">
+                                <a:latin typeface="Cambria Math" panose="02040503050406030204" pitchFamily="18" charset="0"/>
+                              </a:rPr>
+                              <m:t>𝑠</m:t>
+                            </m:r>
+                          </m:e>
+                        </m:d>
+                      </m:e>
+                    </m:d>
                   </m:oMath>
                 </a14:m>
                 <a:br>
@@ -10382,7 +10405,7 @@
             </p:txBody>
           </p:sp>
         </mc:Choice>
-        <mc:Fallback xmlns="">
+        <mc:Fallback>
           <p:sp>
             <p:nvSpPr>
               <p:cNvPr id="7" name="Rectangle 3">
@@ -11587,8 +11610,8 @@
           </a:p>
         </p:txBody>
       </p:sp>
-      <mc:AlternateContent xmlns:mc="http://schemas.openxmlformats.org/markup-compatibility/2006" xmlns:a14="http://schemas.microsoft.com/office/drawing/2010/main">
-        <mc:Choice Requires="a14">
+      <mc:AlternateContent xmlns:mc="http://schemas.openxmlformats.org/markup-compatibility/2006">
+        <mc:Choice xmlns:a14="http://schemas.microsoft.com/office/drawing/2010/main" Requires="a14">
           <p:sp>
             <p:nvSpPr>
               <p:cNvPr id="3" name="Content Placeholder 2">
@@ -11714,6 +11737,21 @@
                           <a:rPr lang="en-US" sz="1800" b="0" i="1" smtClean="0">
                             <a:latin typeface="Cambria Math" panose="02040503050406030204" pitchFamily="18" charset="0"/>
                           </a:rPr>
+                          <m:t>∈</m:t>
+                        </m:r>
+                        <m:r>
+                          <m:rPr>
+                            <m:sty m:val="p"/>
+                          </m:rPr>
+                          <a:rPr lang="en-US" sz="1800" b="0" i="0" smtClean="0">
+                            <a:latin typeface="Cambria Math" panose="02040503050406030204" pitchFamily="18" charset="0"/>
+                          </a:rPr>
+                          <m:t>Π</m:t>
+                        </m:r>
+                        <m:r>
+                          <a:rPr lang="en-US" sz="1800" b="0" i="1" smtClean="0">
+                            <a:latin typeface="Cambria Math" panose="02040503050406030204" pitchFamily="18" charset="0"/>
+                          </a:rPr>
                           <m:t> </m:t>
                         </m:r>
                       </m:sub>
@@ -11799,7 +11837,7 @@
             </p:txBody>
           </p:sp>
         </mc:Choice>
-        <mc:Fallback xmlns="">
+        <mc:Fallback>
           <p:sp>
             <p:nvSpPr>
               <p:cNvPr id="3" name="Content Placeholder 2">
@@ -12581,140 +12619,214 @@
           </a:p>
         </p:txBody>
       </p:sp>
-      <p:sp>
-        <p:nvSpPr>
-          <p:cNvPr id="4" name="Content Placeholder 3">
-            <a:extLst>
-              <a:ext uri="{FF2B5EF4-FFF2-40B4-BE49-F238E27FC236}">
-                <a16:creationId xmlns:a16="http://schemas.microsoft.com/office/drawing/2014/main" id="{95B05243-9E47-495A-B4DB-EA2AB3FF6CCA}"/>
-              </a:ext>
-            </a:extLst>
-          </p:cNvPr>
-          <p:cNvSpPr>
-            <a:spLocks noGrp="1"/>
-          </p:cNvSpPr>
-          <p:nvPr>
-            <p:ph idx="1"/>
-          </p:nvPr>
-        </p:nvSpPr>
-        <p:spPr>
-          <a:xfrm>
-            <a:off x="434577" y="3264059"/>
-            <a:ext cx="5425283" cy="3437042"/>
-          </a:xfrm>
-        </p:spPr>
-        <p:txBody>
-          <a:bodyPr>
-            <a:noAutofit/>
-          </a:bodyPr>
-          <a:lstStyle/>
-          <a:p>
-            <a:pPr marL="0" indent="0">
-              <a:buNone/>
-            </a:pPr>
-            <a:r>
-              <a:rPr lang="en-US" sz="2000" b="1" dirty="0"/>
-              <a:t>Variants</a:t>
-            </a:r>
-            <a:r>
-              <a:rPr lang="en-US" sz="2000" dirty="0"/>
-              <a:t>:</a:t>
-            </a:r>
-          </a:p>
-          <a:p>
-            <a:r>
-              <a:rPr lang="en-US" sz="1800" b="1" dirty="0"/>
-              <a:t>Steepest ascent hill climbing: </a:t>
-            </a:r>
-            <a:r>
-              <a:rPr lang="en-US" sz="1800" dirty="0"/>
-              <a:t>Check all possible successors and choose </a:t>
-            </a:r>
-            <a:r>
-              <a:rPr lang="en-US" sz="1800" dirty="0">
-                <a:solidFill>
-                  <a:srgbClr val="FF0000"/>
-                </a:solidFill>
-              </a:rPr>
-              <a:t>the highest-valued successor.</a:t>
-            </a:r>
-            <a:endParaRPr lang="en-US" sz="1800" b="1" dirty="0"/>
-          </a:p>
-          <a:p>
-            <a:r>
-              <a:rPr lang="en-US" sz="1800" b="1" dirty="0"/>
-              <a:t>Stochastic hill climbing: </a:t>
-            </a:r>
-            <a:r>
-              <a:rPr lang="en-US" sz="1800" dirty="0">
-                <a:solidFill>
-                  <a:srgbClr val="FF0000"/>
-                </a:solidFill>
-              </a:rPr>
-              <a:t>Choose randomly among </a:t>
-            </a:r>
-            <a:r>
-              <a:rPr lang="en-US" sz="1800" b="1" dirty="0">
-                <a:solidFill>
-                  <a:srgbClr val="FF0000"/>
-                </a:solidFill>
-              </a:rPr>
-              <a:t>all</a:t>
-            </a:r>
-            <a:r>
-              <a:rPr lang="en-US" sz="1800" dirty="0">
-                <a:solidFill>
-                  <a:srgbClr val="FF0000"/>
-                </a:solidFill>
-              </a:rPr>
-              <a:t> uphill (improvement) moves</a:t>
-            </a:r>
-            <a:r>
-              <a:rPr lang="en-US" sz="1800" dirty="0"/>
-              <a:t>.</a:t>
-            </a:r>
-          </a:p>
-          <a:p>
-            <a:r>
-              <a:rPr lang="en-US" sz="1800" b="1" dirty="0"/>
-              <a:t>First-choice stochastic hill climbing</a:t>
-            </a:r>
-            <a:r>
-              <a:rPr lang="en-US" sz="1800" dirty="0"/>
-              <a:t>:  </a:t>
-            </a:r>
-            <a:r>
-              <a:rPr lang="en-US" sz="1800" dirty="0">
-                <a:solidFill>
-                  <a:srgbClr val="FF0000"/>
-                </a:solidFill>
-              </a:rPr>
-              <a:t>Generate randomly </a:t>
-            </a:r>
-            <a:r>
-              <a:rPr lang="en-US" sz="1800" b="1" dirty="0">
-                <a:solidFill>
-                  <a:srgbClr val="FF0000"/>
-                </a:solidFill>
-              </a:rPr>
-              <a:t>one</a:t>
-            </a:r>
-            <a:r>
-              <a:rPr lang="en-US" sz="1800" dirty="0">
-                <a:solidFill>
-                  <a:srgbClr val="FF0000"/>
-                </a:solidFill>
-              </a:rPr>
-              <a:t> new successor at a time and only move to better ones. </a:t>
-            </a:r>
-            <a:r>
-              <a:rPr lang="en-US" sz="1800" dirty="0"/>
-              <a:t>This is what people often mean by “stochastic hill climbing.” It is equivalent to a, but computationally much cheaper.</a:t>
-            </a:r>
-            <a:endParaRPr lang="en-US" sz="1800" b="1" dirty="0"/>
-          </a:p>
-        </p:txBody>
-      </p:sp>
+      <mc:AlternateContent xmlns:mc="http://schemas.openxmlformats.org/markup-compatibility/2006">
+        <mc:Choice xmlns:a14="http://schemas.microsoft.com/office/drawing/2010/main" Requires="a14">
+          <p:sp>
+            <p:nvSpPr>
+              <p:cNvPr id="4" name="Content Placeholder 3">
+                <a:extLst>
+                  <a:ext uri="{FF2B5EF4-FFF2-40B4-BE49-F238E27FC236}">
+                    <a16:creationId xmlns:a16="http://schemas.microsoft.com/office/drawing/2014/main" id="{95B05243-9E47-495A-B4DB-EA2AB3FF6CCA}"/>
+                  </a:ext>
+                </a:extLst>
+              </p:cNvPr>
+              <p:cNvSpPr>
+                <a:spLocks noGrp="1"/>
+              </p:cNvSpPr>
+              <p:nvPr>
+                <p:ph idx="1"/>
+              </p:nvPr>
+            </p:nvSpPr>
+            <p:spPr>
+              <a:xfrm>
+                <a:off x="434577" y="3264059"/>
+                <a:ext cx="5425283" cy="3437042"/>
+              </a:xfrm>
+            </p:spPr>
+            <p:txBody>
+              <a:bodyPr>
+                <a:noAutofit/>
+              </a:bodyPr>
+              <a:lstStyle/>
+              <a:p>
+                <a:pPr marL="0" indent="0">
+                  <a:buNone/>
+                </a:pPr>
+                <a:r>
+                  <a:rPr lang="en-US" sz="2000" b="1" dirty="0"/>
+                  <a:t>Variants </a:t>
+                </a:r>
+                <a:r>
+                  <a:rPr lang="en-US" sz="1400" dirty="0"/>
+                  <a:t>(define what successor to choose)</a:t>
+                </a:r>
+                <a:endParaRPr lang="en-US" sz="2000" dirty="0"/>
+              </a:p>
+              <a:p>
+                <a:pPr marL="342900" indent="-342900">
+                  <a:buFont typeface="+mj-lt"/>
+                  <a:buAutoNum type="alphaLcPeriod"/>
+                </a:pPr>
+                <a:r>
+                  <a:rPr lang="en-US" sz="1800" b="1" dirty="0"/>
+                  <a:t>Steepest ascent hill climbing: </a:t>
+                </a:r>
+                <a:r>
+                  <a:rPr lang="en-US" sz="1800" dirty="0"/>
+                  <a:t>Check all possible successors and choose </a:t>
+                </a:r>
+                <a:r>
+                  <a:rPr lang="en-US" sz="1800" dirty="0">
+                    <a:solidFill>
+                      <a:srgbClr val="FF0000"/>
+                    </a:solidFill>
+                  </a:rPr>
+                  <a:t>the highest-valued successor.</a:t>
+                </a:r>
+                <a:endParaRPr lang="en-US" sz="1800" b="1" dirty="0"/>
+              </a:p>
+              <a:p>
+                <a:pPr marL="342900" indent="-342900">
+                  <a:buFont typeface="+mj-lt"/>
+                  <a:buAutoNum type="alphaLcPeriod"/>
+                </a:pPr>
+                <a:r>
+                  <a:rPr lang="en-US" sz="1800" b="1" dirty="0"/>
+                  <a:t>Stochastic hill climbing: </a:t>
+                </a:r>
+                <a:r>
+                  <a:rPr lang="en-US" sz="1800" dirty="0">
+                    <a:solidFill>
+                      <a:srgbClr val="FF0000"/>
+                    </a:solidFill>
+                  </a:rPr>
+                  <a:t>Choose randomly among </a:t>
+                </a:r>
+                <a:r>
+                  <a:rPr lang="en-US" sz="1800" b="1" dirty="0">
+                    <a:solidFill>
+                      <a:srgbClr val="FF0000"/>
+                    </a:solidFill>
+                  </a:rPr>
+                  <a:t>all</a:t>
+                </a:r>
+                <a:r>
+                  <a:rPr lang="en-US" sz="1800" dirty="0">
+                    <a:solidFill>
+                      <a:srgbClr val="FF0000"/>
+                    </a:solidFill>
+                  </a:rPr>
+                  <a:t> uphill (improvement) moves</a:t>
+                </a:r>
+                <a:r>
+                  <a:rPr lang="en-US" sz="1800" dirty="0"/>
+                  <a:t>.</a:t>
+                </a:r>
+              </a:p>
+              <a:p>
+                <a:pPr marL="342900" indent="-342900">
+                  <a:buFont typeface="+mj-lt"/>
+                  <a:buAutoNum type="alphaLcPeriod"/>
+                </a:pPr>
+                <a:r>
+                  <a:rPr lang="en-US" sz="1800" b="1" dirty="0"/>
+                  <a:t>First-choice stochastic hill climbing</a:t>
+                </a:r>
+                <a:r>
+                  <a:rPr lang="en-US" sz="1800" dirty="0"/>
+                  <a:t>:  </a:t>
+                </a:r>
+                <a:r>
+                  <a:rPr lang="en-US" sz="1800" dirty="0">
+                    <a:solidFill>
+                      <a:srgbClr val="FF0000"/>
+                    </a:solidFill>
+                  </a:rPr>
+                  <a:t>Generate randomly </a:t>
+                </a:r>
+                <a:r>
+                  <a:rPr lang="en-US" sz="1800" b="1" dirty="0">
+                    <a:solidFill>
+                      <a:srgbClr val="FF0000"/>
+                    </a:solidFill>
+                  </a:rPr>
+                  <a:t>one</a:t>
+                </a:r>
+                <a:r>
+                  <a:rPr lang="en-US" sz="1800" dirty="0">
+                    <a:solidFill>
+                      <a:srgbClr val="FF0000"/>
+                    </a:solidFill>
+                  </a:rPr>
+                  <a:t> new successor at a time and only move to better ones. </a:t>
+                </a:r>
+                <a:r>
+                  <a:rPr lang="en-US" sz="1800" dirty="0"/>
+                  <a:t>This is what people often mean by “stochastic hill climbing.” It is equivalent to b, but computationally much cheaper (does not evaluate </a:t>
+                </a:r>
+                <a14:m>
+                  <m:oMath xmlns:m="http://schemas.openxmlformats.org/officeDocument/2006/math">
+                    <m:r>
+                      <a:rPr lang="en-US" sz="1800" b="0" i="1" smtClean="0">
+                        <a:latin typeface="Cambria Math" panose="02040503050406030204" pitchFamily="18" charset="0"/>
+                      </a:rPr>
+                      <m:t>h</m:t>
+                    </m:r>
+                  </m:oMath>
+                </a14:m>
+                <a:r>
+                  <a:rPr lang="en-US" sz="1800" dirty="0"/>
+                  <a:t> for each neighbor).</a:t>
+                </a:r>
+                <a:endParaRPr lang="en-US" sz="1800" b="1" dirty="0"/>
+              </a:p>
+            </p:txBody>
+          </p:sp>
+        </mc:Choice>
+        <mc:Fallback>
+          <p:sp>
+            <p:nvSpPr>
+              <p:cNvPr id="4" name="Content Placeholder 3">
+                <a:extLst>
+                  <a:ext uri="{FF2B5EF4-FFF2-40B4-BE49-F238E27FC236}">
+                    <a16:creationId xmlns:a16="http://schemas.microsoft.com/office/drawing/2014/main" id="{95B05243-9E47-495A-B4DB-EA2AB3FF6CCA}"/>
+                  </a:ext>
+                </a:extLst>
+              </p:cNvPr>
+              <p:cNvSpPr>
+                <a:spLocks noGrp="1" noRot="1" noChangeAspect="1" noMove="1" noResize="1" noEditPoints="1" noAdjustHandles="1" noChangeArrowheads="1" noChangeShapeType="1" noTextEdit="1"/>
+              </p:cNvSpPr>
+              <p:nvPr>
+                <p:ph idx="1"/>
+              </p:nvPr>
+            </p:nvSpPr>
+            <p:spPr>
+              <a:xfrm>
+                <a:off x="434577" y="3264059"/>
+                <a:ext cx="5425283" cy="3437042"/>
+              </a:xfrm>
+              <a:blipFill>
+                <a:blip r:embed="rId3"/>
+                <a:stretch>
+                  <a:fillRect l="-1124" t="-1773" r="-562"/>
+                </a:stretch>
+              </a:blipFill>
+            </p:spPr>
+            <p:txBody>
+              <a:bodyPr/>
+              <a:lstStyle/>
+              <a:p>
+                <a:r>
+                  <a:rPr lang="en-US">
+                    <a:noFill/>
+                  </a:rPr>
+                  <a:t> </a:t>
+                </a:r>
+              </a:p>
+            </p:txBody>
+          </p:sp>
+        </mc:Fallback>
+      </mc:AlternateContent>
       <p:grpSp>
         <p:nvGrpSpPr>
           <p:cNvPr id="6" name="Group 5" descr="The hill climbing algorithm.">
@@ -12730,9 +12842,9 @@
         <p:grpSpPr>
           <a:xfrm>
             <a:off x="1143000" y="1256523"/>
-            <a:ext cx="6858000" cy="1999177"/>
+            <a:ext cx="6858644" cy="1935834"/>
             <a:chOff x="685800" y="1234121"/>
-            <a:chExt cx="7315200" cy="2105541"/>
+            <a:chExt cx="7315887" cy="2038828"/>
           </a:xfrm>
         </p:grpSpPr>
         <p:pic>
@@ -12750,7 +12862,7 @@
             <p:nvPr/>
           </p:nvPicPr>
           <p:blipFill>
-            <a:blip r:embed="rId3"/>
+            <a:blip r:embed="rId4"/>
             <a:stretch>
               <a:fillRect/>
             </a:stretch>
@@ -12889,8 +13001,8 @@
           </p:nvSpPr>
           <p:spPr>
             <a:xfrm>
-              <a:off x="6504004" y="1234121"/>
-              <a:ext cx="1449371" cy="369332"/>
+              <a:off x="6455691" y="1234121"/>
+              <a:ext cx="1545996" cy="388982"/>
             </a:xfrm>
             <a:prstGeom prst="rect">
               <a:avLst/>
@@ -12918,6 +13030,7 @@
             </a:bodyPr>
             <a:lstStyle/>
             <a:p>
+              <a:pPr algn="ctr"/>
               <a:r>
                 <a:rPr lang="en-US" dirty="0"/>
                 <a:t>Maximization</a:t>
@@ -12925,125 +13038,6 @@
             </a:p>
           </p:txBody>
         </p:sp>
-        <mc:AlternateContent xmlns:mc="http://schemas.openxmlformats.org/markup-compatibility/2006" xmlns:a14="http://schemas.microsoft.com/office/drawing/2010/main">
-          <mc:Choice Requires="a14">
-            <p:sp>
-              <p:nvSpPr>
-                <p:cNvPr id="10" name="Speech Bubble: Rectangle with Corners Rounded 9">
-                  <a:extLst>
-                    <a:ext uri="{FF2B5EF4-FFF2-40B4-BE49-F238E27FC236}">
-                      <a16:creationId xmlns:a16="http://schemas.microsoft.com/office/drawing/2014/main" id="{A20B294D-59E9-5287-A6CB-A18147F7BFB8}"/>
-                    </a:ext>
-                  </a:extLst>
-                </p:cNvPr>
-                <p:cNvSpPr/>
-                <p:nvPr/>
-              </p:nvSpPr>
-              <p:spPr>
-                <a:xfrm>
-                  <a:off x="3311338" y="3111062"/>
-                  <a:ext cx="2286000" cy="228600"/>
-                </a:xfrm>
-                <a:prstGeom prst="wedgeRoundRectCallout">
-                  <a:avLst>
-                    <a:gd name="adj1" fmla="val -56926"/>
-                    <a:gd name="adj2" fmla="val -138635"/>
-                    <a:gd name="adj3" fmla="val 16667"/>
-                  </a:avLst>
-                </a:prstGeom>
-              </p:spPr>
-              <p:style>
-                <a:lnRef idx="2">
-                  <a:schemeClr val="accent2">
-                    <a:shade val="50000"/>
-                  </a:schemeClr>
-                </a:lnRef>
-                <a:fillRef idx="1">
-                  <a:schemeClr val="accent2"/>
-                </a:fillRef>
-                <a:effectRef idx="0">
-                  <a:schemeClr val="accent2"/>
-                </a:effectRef>
-                <a:fontRef idx="minor">
-                  <a:schemeClr val="lt1"/>
-                </a:fontRef>
-              </p:style>
-              <p:txBody>
-                <a:bodyPr rtlCol="0" anchor="ctr"/>
-                <a:lstStyle/>
-                <a:p>
-                  <a:pPr algn="ctr"/>
-                  <a:r>
-                    <a:rPr lang="en-US" sz="1600" dirty="0"/>
-                    <a:t>Use </a:t>
-                  </a:r>
-                  <a14:m>
-                    <m:oMath xmlns:m="http://schemas.openxmlformats.org/officeDocument/2006/math">
-                      <m:r>
-                        <a:rPr lang="en-US" sz="1600" b="0" i="1" smtClean="0">
-                          <a:latin typeface="Cambria Math" panose="02040503050406030204" pitchFamily="18" charset="0"/>
-                        </a:rPr>
-                        <m:t>≥ </m:t>
-                      </m:r>
-                    </m:oMath>
-                  </a14:m>
-                  <a:r>
-                    <a:rPr lang="en-US" sz="1600" dirty="0"/>
-                    <a:t>for minimization</a:t>
-                  </a:r>
-                </a:p>
-              </p:txBody>
-            </p:sp>
-          </mc:Choice>
-          <mc:Fallback xmlns="">
-            <p:sp>
-              <p:nvSpPr>
-                <p:cNvPr id="10" name="Speech Bubble: Rectangle with Corners Rounded 9">
-                  <a:extLst>
-                    <a:ext uri="{FF2B5EF4-FFF2-40B4-BE49-F238E27FC236}">
-                      <a16:creationId xmlns:a16="http://schemas.microsoft.com/office/drawing/2014/main" id="{A20B294D-59E9-5287-A6CB-A18147F7BFB8}"/>
-                    </a:ext>
-                  </a:extLst>
-                </p:cNvPr>
-                <p:cNvSpPr>
-                  <a:spLocks noRot="1" noChangeAspect="1" noMove="1" noResize="1" noEditPoints="1" noAdjustHandles="1" noChangeArrowheads="1" noChangeShapeType="1" noTextEdit="1"/>
-                </p:cNvSpPr>
-                <p:nvPr/>
-              </p:nvSpPr>
-              <p:spPr>
-                <a:xfrm>
-                  <a:off x="3311338" y="3111062"/>
-                  <a:ext cx="2286000" cy="228600"/>
-                </a:xfrm>
-                <a:prstGeom prst="wedgeRoundRectCallout">
-                  <a:avLst>
-                    <a:gd name="adj1" fmla="val -56926"/>
-                    <a:gd name="adj2" fmla="val -138635"/>
-                    <a:gd name="adj3" fmla="val 16667"/>
-                  </a:avLst>
-                </a:prstGeom>
-                <a:blipFill>
-                  <a:blip r:embed="rId5"/>
-                  <a:stretch>
-                    <a:fillRect b="-27632"/>
-                  </a:stretch>
-                </a:blipFill>
-              </p:spPr>
-              <p:txBody>
-                <a:bodyPr/>
-                <a:lstStyle/>
-                <a:p>
-                  <a:r>
-                    <a:rPr lang="en-US">
-                      <a:noFill/>
-                    </a:rPr>
-                    <a:t> </a:t>
-                  </a:r>
-                </a:p>
-              </p:txBody>
-            </p:sp>
-          </mc:Fallback>
-        </mc:AlternateContent>
       </p:grpSp>
       <p:grpSp>
         <p:nvGrpSpPr>
@@ -13103,7 +13097,7 @@
               <p:nvPr/>
             </p:nvPicPr>
             <p:blipFill>
-              <a:blip r:embed="rId6" cstate="print"/>
+              <a:blip r:embed="rId5" cstate="print"/>
               <a:srcRect/>
               <a:stretch>
                 <a:fillRect/>
@@ -13274,6 +13268,125 @@
           </mc:Fallback>
         </mc:AlternateContent>
       </p:grpSp>
+      <mc:AlternateContent xmlns:mc="http://schemas.openxmlformats.org/markup-compatibility/2006">
+        <mc:Choice xmlns:a14="http://schemas.microsoft.com/office/drawing/2010/main" Requires="a14">
+          <p:sp>
+            <p:nvSpPr>
+              <p:cNvPr id="12" name="Speech Bubble: Rectangle with Corners Rounded 11">
+                <a:extLst>
+                  <a:ext uri="{FF2B5EF4-FFF2-40B4-BE49-F238E27FC236}">
+                    <a16:creationId xmlns:a16="http://schemas.microsoft.com/office/drawing/2014/main" id="{A20B294D-59E9-5287-A6CB-A18147F7BFB8}"/>
+                  </a:ext>
+                </a:extLst>
+              </p:cNvPr>
+              <p:cNvSpPr/>
+              <p:nvPr/>
+            </p:nvSpPr>
+            <p:spPr>
+              <a:xfrm>
+                <a:off x="3894656" y="2925947"/>
+                <a:ext cx="4813388" cy="222141"/>
+              </a:xfrm>
+              <a:prstGeom prst="wedgeRoundRectCallout">
+                <a:avLst>
+                  <a:gd name="adj1" fmla="val -55239"/>
+                  <a:gd name="adj2" fmla="val -102535"/>
+                  <a:gd name="adj3" fmla="val 16667"/>
+                </a:avLst>
+              </a:prstGeom>
+            </p:spPr>
+            <p:style>
+              <a:lnRef idx="2">
+                <a:schemeClr val="accent2">
+                  <a:shade val="50000"/>
+                </a:schemeClr>
+              </a:lnRef>
+              <a:fillRef idx="1">
+                <a:schemeClr val="accent2"/>
+              </a:fillRef>
+              <a:effectRef idx="0">
+                <a:schemeClr val="accent2"/>
+              </a:effectRef>
+              <a:fontRef idx="minor">
+                <a:schemeClr val="lt1"/>
+              </a:fontRef>
+            </p:style>
+            <p:txBody>
+              <a:bodyPr rtlCol="0" anchor="ctr"/>
+              <a:lstStyle/>
+              <a:p>
+                <a:pPr algn="ctr"/>
+                <a:r>
+                  <a:rPr lang="en-US" sz="1600" dirty="0"/>
+                  <a:t>Use lowest-valued successor and  </a:t>
+                </a:r>
+                <a14:m>
+                  <m:oMath xmlns:m="http://schemas.openxmlformats.org/officeDocument/2006/math">
+                    <m:r>
+                      <a:rPr lang="en-US" sz="1600" b="0" i="1" smtClean="0">
+                        <a:latin typeface="Cambria Math" panose="02040503050406030204" pitchFamily="18" charset="0"/>
+                      </a:rPr>
+                      <m:t>≥ </m:t>
+                    </m:r>
+                  </m:oMath>
+                </a14:m>
+                <a:r>
+                  <a:rPr lang="en-US" sz="1600" dirty="0"/>
+                  <a:t>for minimization</a:t>
+                </a:r>
+              </a:p>
+            </p:txBody>
+          </p:sp>
+        </mc:Choice>
+        <mc:Fallback>
+          <p:sp>
+            <p:nvSpPr>
+              <p:cNvPr id="12" name="Speech Bubble: Rectangle with Corners Rounded 11">
+                <a:extLst>
+                  <a:ext uri="{FF2B5EF4-FFF2-40B4-BE49-F238E27FC236}">
+                    <a16:creationId xmlns:a16="http://schemas.microsoft.com/office/drawing/2014/main" id="{A20B294D-59E9-5287-A6CB-A18147F7BFB8}"/>
+                  </a:ext>
+                </a:extLst>
+              </p:cNvPr>
+              <p:cNvSpPr>
+                <a:spLocks noRot="1" noChangeAspect="1" noMove="1" noResize="1" noEditPoints="1" noAdjustHandles="1" noChangeArrowheads="1" noChangeShapeType="1" noTextEdit="1"/>
+              </p:cNvSpPr>
+              <p:nvPr/>
+            </p:nvSpPr>
+            <p:spPr>
+              <a:xfrm>
+                <a:off x="3894656" y="2925947"/>
+                <a:ext cx="4813388" cy="222141"/>
+              </a:xfrm>
+              <a:prstGeom prst="wedgeRoundRectCallout">
+                <a:avLst>
+                  <a:gd name="adj1" fmla="val -55239"/>
+                  <a:gd name="adj2" fmla="val -102535"/>
+                  <a:gd name="adj3" fmla="val 16667"/>
+                </a:avLst>
+              </a:prstGeom>
+              <a:blipFill>
+                <a:blip r:embed="rId8"/>
+                <a:stretch>
+                  <a:fillRect b="-37931"/>
+                </a:stretch>
+              </a:blipFill>
+            </p:spPr>
+            <p:txBody>
+              <a:bodyPr/>
+              <a:lstStyle/>
+              <a:p>
+                <a:r>
+                  <a:rPr lang="en-US">
+                    <a:noFill/>
+                  </a:rPr>
+                  <a:t> </a:t>
+                </a:r>
+              </a:p>
+            </p:txBody>
+          </p:sp>
+        </mc:Fallback>
+      </mc:AlternateContent>
     </p:spTree>
   </p:cSld>
   <p:clrMapOvr>
@@ -13291,9 +13404,6 @@
                     <p:cTn id="3" fill="hold">
                       <p:stCondLst>
                         <p:cond delay="indefinite"/>
-                        <p:cond evt="onBegin" delay="0">
-                          <p:tn val="2"/>
-                        </p:cond>
                       </p:stCondLst>
                       <p:childTnLst>
                         <p:par>
@@ -13303,7 +13413,7 @@
                             </p:stCondLst>
                             <p:childTnLst>
                               <p:par>
-                                <p:cTn id="5" presetID="1" presetClass="entr" presetSubtype="0" fill="hold" grpId="0" nodeType="withEffect">
+                                <p:cTn id="5" presetID="1" presetClass="entr" presetSubtype="0" fill="hold" nodeType="clickEffect">
                                   <p:stCondLst>
                                     <p:cond delay="0"/>
                                   </p:stCondLst>
@@ -13316,11 +13426,7 @@
                                           </p:stCondLst>
                                         </p:cTn>
                                         <p:tgtEl>
-                                          <p:spTgt spid="4">
-                                            <p:txEl>
-                                              <p:pRg st="0" end="0"/>
-                                            </p:txEl>
-                                          </p:spTgt>
+                                          <p:spTgt spid="14"/>
                                         </p:tgtEl>
                                         <p:attrNameLst>
                                           <p:attrName>style.visibility</p:attrName>
@@ -13365,11 +13471,7 @@
                                           </p:stCondLst>
                                         </p:cTn>
                                         <p:tgtEl>
-                                          <p:spTgt spid="4">
-                                            <p:txEl>
-                                              <p:pRg st="1" end="1"/>
-                                            </p:txEl>
-                                          </p:spTgt>
+                                          <p:spTgt spid="12"/>
                                         </p:tgtEl>
                                         <p:attrNameLst>
                                           <p:attrName>style.visibility</p:attrName>
@@ -13416,7 +13518,7 @@
                                         <p:tgtEl>
                                           <p:spTgt spid="4">
                                             <p:txEl>
-                                              <p:pRg st="2" end="2"/>
+                                              <p:pRg st="0" end="0"/>
                                             </p:txEl>
                                           </p:spTgt>
                                         </p:tgtEl>
@@ -13458,6 +13560,104 @@
                                     <p:set>
                                       <p:cBhvr>
                                         <p:cTn id="18" dur="1" fill="hold">
+                                          <p:stCondLst>
+                                            <p:cond delay="0"/>
+                                          </p:stCondLst>
+                                        </p:cTn>
+                                        <p:tgtEl>
+                                          <p:spTgt spid="4">
+                                            <p:txEl>
+                                              <p:pRg st="1" end="1"/>
+                                            </p:txEl>
+                                          </p:spTgt>
+                                        </p:tgtEl>
+                                        <p:attrNameLst>
+                                          <p:attrName>style.visibility</p:attrName>
+                                        </p:attrNameLst>
+                                      </p:cBhvr>
+                                      <p:to>
+                                        <p:strVal val="visible"/>
+                                      </p:to>
+                                    </p:set>
+                                  </p:childTnLst>
+                                </p:cTn>
+                              </p:par>
+                            </p:childTnLst>
+                          </p:cTn>
+                        </p:par>
+                      </p:childTnLst>
+                    </p:cTn>
+                  </p:par>
+                  <p:par>
+                    <p:cTn id="19" fill="hold">
+                      <p:stCondLst>
+                        <p:cond delay="indefinite"/>
+                      </p:stCondLst>
+                      <p:childTnLst>
+                        <p:par>
+                          <p:cTn id="20" fill="hold">
+                            <p:stCondLst>
+                              <p:cond delay="0"/>
+                            </p:stCondLst>
+                            <p:childTnLst>
+                              <p:par>
+                                <p:cTn id="21" presetID="1" presetClass="entr" presetSubtype="0" fill="hold" grpId="0" nodeType="clickEffect">
+                                  <p:stCondLst>
+                                    <p:cond delay="0"/>
+                                  </p:stCondLst>
+                                  <p:childTnLst>
+                                    <p:set>
+                                      <p:cBhvr>
+                                        <p:cTn id="22" dur="1" fill="hold">
+                                          <p:stCondLst>
+                                            <p:cond delay="0"/>
+                                          </p:stCondLst>
+                                        </p:cTn>
+                                        <p:tgtEl>
+                                          <p:spTgt spid="4">
+                                            <p:txEl>
+                                              <p:pRg st="2" end="2"/>
+                                            </p:txEl>
+                                          </p:spTgt>
+                                        </p:tgtEl>
+                                        <p:attrNameLst>
+                                          <p:attrName>style.visibility</p:attrName>
+                                        </p:attrNameLst>
+                                      </p:cBhvr>
+                                      <p:to>
+                                        <p:strVal val="visible"/>
+                                      </p:to>
+                                    </p:set>
+                                  </p:childTnLst>
+                                </p:cTn>
+                              </p:par>
+                            </p:childTnLst>
+                          </p:cTn>
+                        </p:par>
+                      </p:childTnLst>
+                    </p:cTn>
+                  </p:par>
+                  <p:par>
+                    <p:cTn id="23" fill="hold">
+                      <p:stCondLst>
+                        <p:cond delay="indefinite"/>
+                      </p:stCondLst>
+                      <p:childTnLst>
+                        <p:par>
+                          <p:cTn id="24" fill="hold">
+                            <p:stCondLst>
+                              <p:cond delay="0"/>
+                            </p:stCondLst>
+                            <p:childTnLst>
+                              <p:par>
+                                <p:cTn id="25" presetID="1" presetClass="entr" presetSubtype="0" fill="hold" grpId="0" nodeType="clickEffect">
+                                  <p:stCondLst>
+                                    <p:cond delay="0"/>
+                                  </p:stCondLst>
+                                  <p:childTnLst>
+                                    <p:set>
+                                      <p:cBhvr>
+                                        <p:cTn id="26" dur="1" fill="hold">
                                           <p:stCondLst>
                                             <p:cond delay="0"/>
                                           </p:stCondLst>
@@ -13509,6 +13709,7 @@
     </p:tnLst>
     <p:bldLst>
       <p:bldP spid="4" grpId="0" uiExpand="1" build="p"/>
+      <p:bldP spid="12" grpId="0" animBg="1"/>
     </p:bldLst>
   </p:timing>
 </p:sld>
@@ -13786,7 +13987,7 @@
         </p:spPr>
         <p:txBody>
           <a:bodyPr>
-            <a:normAutofit fontScale="77500" lnSpcReduction="20000"/>
+            <a:normAutofit fontScale="62500" lnSpcReduction="20000"/>
           </a:bodyPr>
           <a:lstStyle/>
           <a:p>
@@ -13795,7 +13996,30 @@
             </a:pPr>
             <a:r>
               <a:rPr lang="en-US" sz="2400" dirty="0"/>
-              <a:t>Hill-climbing search is like greedy best-first search with the objective function as a (maybe not admissible) heuristic. It only stores the current state (has no frontier data structure) and just stops at a dead end. </a:t>
+              <a:t>Hill-climbing search is </a:t>
+            </a:r>
+            <a:r>
+              <a:rPr lang="en-US" sz="2400" b="1" dirty="0"/>
+              <a:t>greedy</a:t>
+            </a:r>
+            <a:r>
+              <a:rPr lang="en-US" sz="2400" dirty="0"/>
+              <a:t> (like greedy best-first search) with the objective function as a typically not admissible heuristic. </a:t>
+            </a:r>
+            <a:br>
+              <a:rPr lang="en-US" sz="2400" dirty="0"/>
+            </a:br>
+            <a:r>
+              <a:rPr lang="en-US" sz="2400" dirty="0"/>
+              <a:t>It only stores the current state (has no frontier data structure) and </a:t>
+            </a:r>
+            <a:r>
+              <a:rPr lang="en-US" sz="2400" b="1" dirty="0"/>
+              <a:t>just stops at a dead end</a:t>
+            </a:r>
+            <a:r>
+              <a:rPr lang="en-US" sz="2400" dirty="0"/>
+              <a:t>. </a:t>
             </a:r>
             <a:endParaRPr lang="en-US" sz="2400" dirty="0">
               <a:solidFill>
@@ -13814,6 +14038,13 @@
                 </a:solidFill>
               </a:rPr>
               <a:t>Is it complete/optimal?</a:t>
+            </a:r>
+          </a:p>
+          <a:p>
+            <a:pPr lvl="1"/>
+            <a:r>
+              <a:rPr lang="en-US" sz="2000" dirty="0"/>
+              <a:t>For local search optimality and complete mean the same thing!</a:t>
             </a:r>
           </a:p>
           <a:p>
@@ -14048,72 +14279,134 @@
           </a:p>
         </p:txBody>
       </p:sp>
-      <p:sp>
-        <p:nvSpPr>
-          <p:cNvPr id="10" name="TextBox 9">
-            <a:extLst>
-              <a:ext uri="{FF2B5EF4-FFF2-40B4-BE49-F238E27FC236}">
-                <a16:creationId xmlns:a16="http://schemas.microsoft.com/office/drawing/2014/main" id="{0F1C3F5A-F544-CE10-72BB-7FCE8A2BF847}"/>
-              </a:ext>
-            </a:extLst>
-          </p:cNvPr>
-          <p:cNvSpPr txBox="1"/>
-          <p:nvPr/>
-        </p:nvSpPr>
-        <p:spPr>
-          <a:xfrm>
-            <a:off x="602146" y="5403363"/>
-            <a:ext cx="7620000" cy="1169551"/>
-          </a:xfrm>
-          <a:prstGeom prst="rect">
-            <a:avLst/>
-          </a:prstGeom>
-        </p:spPr>
-        <p:style>
-          <a:lnRef idx="2">
-            <a:schemeClr val="accent6">
-              <a:shade val="15000"/>
-            </a:schemeClr>
-          </a:lnRef>
-          <a:fillRef idx="1">
-            <a:schemeClr val="accent6"/>
-          </a:fillRef>
-          <a:effectRef idx="0">
-            <a:schemeClr val="accent6"/>
-          </a:effectRef>
-          <a:fontRef idx="minor">
-            <a:schemeClr val="lt1"/>
-          </a:fontRef>
-        </p:style>
-        <p:txBody>
-          <a:bodyPr wrap="square">
-            <a:spAutoFit/>
-          </a:bodyPr>
-          <a:lstStyle/>
-          <a:p>
-            <a:r>
-              <a:rPr lang="en-US" dirty="0"/>
-              <a:t>Simple approach that can help with local optima:</a:t>
-            </a:r>
-          </a:p>
-          <a:p>
-            <a:pPr lvl="1"/>
-            <a:r>
-              <a:rPr lang="en-US" b="1" dirty="0"/>
-              <a:t>Random-restart hill climbing</a:t>
-            </a:r>
-            <a:r>
-              <a:rPr lang="en-US" sz="2000" b="1" dirty="0"/>
-              <a:t>: </a:t>
-            </a:r>
-            <a:r>
-              <a:rPr lang="en-US" sz="1600" dirty="0"/>
-              <a:t>Restart hill-climbing many times with random initial states and return the best solution. This strategy can be used for any stochastic (i.e., randomized) algorithm.</a:t>
-            </a:r>
-            <a:endParaRPr lang="en-US" sz="1400" dirty="0"/>
-          </a:p>
-        </p:txBody>
-      </p:sp>
+      <mc:AlternateContent xmlns:mc="http://schemas.openxmlformats.org/markup-compatibility/2006">
+        <mc:Choice xmlns:a14="http://schemas.microsoft.com/office/drawing/2010/main" Requires="a14">
+          <p:sp>
+            <p:nvSpPr>
+              <p:cNvPr id="10" name="TextBox 9">
+                <a:extLst>
+                  <a:ext uri="{FF2B5EF4-FFF2-40B4-BE49-F238E27FC236}">
+                    <a16:creationId xmlns:a16="http://schemas.microsoft.com/office/drawing/2014/main" id="{0F1C3F5A-F544-CE10-72BB-7FCE8A2BF847}"/>
+                  </a:ext>
+                </a:extLst>
+              </p:cNvPr>
+              <p:cNvSpPr txBox="1"/>
+              <p:nvPr/>
+            </p:nvSpPr>
+            <p:spPr>
+              <a:xfrm>
+                <a:off x="602146" y="5403363"/>
+                <a:ext cx="7620000" cy="1169551"/>
+              </a:xfrm>
+              <a:prstGeom prst="rect">
+                <a:avLst/>
+              </a:prstGeom>
+            </p:spPr>
+            <p:style>
+              <a:lnRef idx="2">
+                <a:schemeClr val="accent6">
+                  <a:shade val="15000"/>
+                </a:schemeClr>
+              </a:lnRef>
+              <a:fillRef idx="1">
+                <a:schemeClr val="accent6"/>
+              </a:fillRef>
+              <a:effectRef idx="0">
+                <a:schemeClr val="accent6"/>
+              </a:effectRef>
+              <a:fontRef idx="minor">
+                <a:schemeClr val="lt1"/>
+              </a:fontRef>
+            </p:style>
+            <p:txBody>
+              <a:bodyPr wrap="square">
+                <a:spAutoFit/>
+              </a:bodyPr>
+              <a:lstStyle/>
+              <a:p>
+                <a:r>
+                  <a:rPr lang="en-US" dirty="0"/>
+                  <a:t>Simple approach that can help with local optima:</a:t>
+                </a:r>
+              </a:p>
+              <a:p>
+                <a:pPr lvl="1"/>
+                <a:r>
+                  <a:rPr lang="en-US" b="1" dirty="0"/>
+                  <a:t>Random-restart hill climbing</a:t>
+                </a:r>
+                <a:r>
+                  <a:rPr lang="en-US" sz="2000" b="1" dirty="0"/>
+                  <a:t>: </a:t>
+                </a:r>
+                <a:r>
+                  <a:rPr lang="en-US" sz="1600" dirty="0"/>
+                  <a:t>Restart hill-climbing many times with random initial states and return the best solution. This strategy can be used for any stochastic (i.e., randomized) algorithm (randomized DFS, </a:t>
+                </a:r>
+                <a14:m>
+                  <m:oMath xmlns:m="http://schemas.openxmlformats.org/officeDocument/2006/math">
+                    <m:r>
+                      <a:rPr lang="en-US" sz="1600" i="1" dirty="0" smtClean="0">
+                        <a:latin typeface="Cambria Math" panose="02040503050406030204" pitchFamily="18" charset="0"/>
+                      </a:rPr>
+                      <m:t>𝑘</m:t>
+                    </m:r>
+                  </m:oMath>
+                </a14:m>
+                <a:r>
+                  <a:rPr lang="en-US" sz="1600" dirty="0"/>
+                  <a:t>-means, …).</a:t>
+                </a:r>
+                <a:endParaRPr lang="en-US" sz="1400" dirty="0"/>
+              </a:p>
+            </p:txBody>
+          </p:sp>
+        </mc:Choice>
+        <mc:Fallback>
+          <p:sp>
+            <p:nvSpPr>
+              <p:cNvPr id="10" name="TextBox 9">
+                <a:extLst>
+                  <a:ext uri="{FF2B5EF4-FFF2-40B4-BE49-F238E27FC236}">
+                    <a16:creationId xmlns:a16="http://schemas.microsoft.com/office/drawing/2014/main" id="{0F1C3F5A-F544-CE10-72BB-7FCE8A2BF847}"/>
+                  </a:ext>
+                </a:extLst>
+              </p:cNvPr>
+              <p:cNvSpPr txBox="1">
+                <a:spLocks noRot="1" noChangeAspect="1" noMove="1" noResize="1" noEditPoints="1" noAdjustHandles="1" noChangeArrowheads="1" noChangeShapeType="1" noTextEdit="1"/>
+              </p:cNvSpPr>
+              <p:nvPr/>
+            </p:nvSpPr>
+            <p:spPr>
+              <a:xfrm>
+                <a:off x="602146" y="5403363"/>
+                <a:ext cx="7620000" cy="1169551"/>
+              </a:xfrm>
+              <a:prstGeom prst="rect">
+                <a:avLst/>
+              </a:prstGeom>
+              <a:blipFill>
+                <a:blip r:embed="rId5"/>
+                <a:stretch>
+                  <a:fillRect l="-639" t="-2062" b="-5155"/>
+                </a:stretch>
+              </a:blipFill>
+            </p:spPr>
+            <p:txBody>
+              <a:bodyPr/>
+              <a:lstStyle/>
+              <a:p>
+                <a:r>
+                  <a:rPr lang="en-US">
+                    <a:noFill/>
+                  </a:rPr>
+                  <a:t> </a:t>
+                </a:r>
+              </a:p>
+            </p:txBody>
+          </p:sp>
+        </mc:Fallback>
+      </mc:AlternateContent>
     </p:spTree>
   </p:cSld>
   <p:clrMapOvr>
@@ -14131,6 +14424,9 @@
                     <p:cTn id="3" fill="hold">
                       <p:stCondLst>
                         <p:cond delay="indefinite"/>
+                        <p:cond evt="onBegin" delay="0">
+                          <p:tn val="2"/>
+                        </p:cond>
                       </p:stCondLst>
                       <p:childTnLst>
                         <p:par>
@@ -14140,7 +14436,7 @@
                             </p:stCondLst>
                             <p:childTnLst>
                               <p:par>
-                                <p:cTn id="5" presetID="1" presetClass="entr" presetSubtype="0" fill="hold" nodeType="clickEffect">
+                                <p:cTn id="5" presetID="1" presetClass="entr" presetSubtype="0" fill="hold" grpId="0" nodeType="withEffect">
                                   <p:stCondLst>
                                     <p:cond delay="0"/>
                                   </p:stCondLst>
@@ -14148,6 +14444,104 @@
                                     <p:set>
                                       <p:cBhvr>
                                         <p:cTn id="6" dur="1" fill="hold">
+                                          <p:stCondLst>
+                                            <p:cond delay="0"/>
+                                          </p:stCondLst>
+                                        </p:cTn>
+                                        <p:tgtEl>
+                                          <p:spTgt spid="35843">
+                                            <p:txEl>
+                                              <p:pRg st="0" end="0"/>
+                                            </p:txEl>
+                                          </p:spTgt>
+                                        </p:tgtEl>
+                                        <p:attrNameLst>
+                                          <p:attrName>style.visibility</p:attrName>
+                                        </p:attrNameLst>
+                                      </p:cBhvr>
+                                      <p:to>
+                                        <p:strVal val="visible"/>
+                                      </p:to>
+                                    </p:set>
+                                  </p:childTnLst>
+                                </p:cTn>
+                              </p:par>
+                            </p:childTnLst>
+                          </p:cTn>
+                        </p:par>
+                      </p:childTnLst>
+                    </p:cTn>
+                  </p:par>
+                  <p:par>
+                    <p:cTn id="7" fill="hold">
+                      <p:stCondLst>
+                        <p:cond delay="indefinite"/>
+                      </p:stCondLst>
+                      <p:childTnLst>
+                        <p:par>
+                          <p:cTn id="8" fill="hold">
+                            <p:stCondLst>
+                              <p:cond delay="0"/>
+                            </p:stCondLst>
+                            <p:childTnLst>
+                              <p:par>
+                                <p:cTn id="9" presetID="1" presetClass="entr" presetSubtype="0" fill="hold" grpId="0" nodeType="clickEffect">
+                                  <p:stCondLst>
+                                    <p:cond delay="0"/>
+                                  </p:stCondLst>
+                                  <p:childTnLst>
+                                    <p:set>
+                                      <p:cBhvr>
+                                        <p:cTn id="10" dur="1" fill="hold">
+                                          <p:stCondLst>
+                                            <p:cond delay="0"/>
+                                          </p:stCondLst>
+                                        </p:cTn>
+                                        <p:tgtEl>
+                                          <p:spTgt spid="35843">
+                                            <p:txEl>
+                                              <p:pRg st="1" end="1"/>
+                                            </p:txEl>
+                                          </p:spTgt>
+                                        </p:tgtEl>
+                                        <p:attrNameLst>
+                                          <p:attrName>style.visibility</p:attrName>
+                                        </p:attrNameLst>
+                                      </p:cBhvr>
+                                      <p:to>
+                                        <p:strVal val="visible"/>
+                                      </p:to>
+                                    </p:set>
+                                  </p:childTnLst>
+                                </p:cTn>
+                              </p:par>
+                            </p:childTnLst>
+                          </p:cTn>
+                        </p:par>
+                      </p:childTnLst>
+                    </p:cTn>
+                  </p:par>
+                  <p:par>
+                    <p:cTn id="11" fill="hold">
+                      <p:stCondLst>
+                        <p:cond delay="indefinite"/>
+                      </p:stCondLst>
+                      <p:childTnLst>
+                        <p:par>
+                          <p:cTn id="12" fill="hold">
+                            <p:stCondLst>
+                              <p:cond delay="0"/>
+                            </p:stCondLst>
+                            <p:childTnLst>
+                              <p:par>
+                                <p:cTn id="13" presetID="1" presetClass="entr" presetSubtype="0" fill="hold" grpId="0" nodeType="clickEffect">
+                                  <p:stCondLst>
+                                    <p:cond delay="0"/>
+                                  </p:stCondLst>
+                                  <p:childTnLst>
+                                    <p:set>
+                                      <p:cBhvr>
+                                        <p:cTn id="14" dur="1" fill="hold">
                                           <p:stCondLst>
                                             <p:cond delay="0"/>
                                           </p:stCondLst>
@@ -14171,20 +14565,78 @@
                                 </p:cTn>
                               </p:par>
                               <p:par>
-                                <p:cTn id="7" presetID="1" presetClass="entr" presetSubtype="0" fill="hold" grpId="0" nodeType="withEffect">
+                                <p:cTn id="15" presetID="1" presetClass="entr" presetSubtype="0" fill="hold" grpId="0" nodeType="withEffect">
                                   <p:stCondLst>
                                     <p:cond delay="0"/>
                                   </p:stCondLst>
                                   <p:childTnLst>
                                     <p:set>
                                       <p:cBhvr>
-                                        <p:cTn id="8" dur="1" fill="hold">
+                                        <p:cTn id="16" dur="1" fill="hold">
+                                          <p:stCondLst>
+                                            <p:cond delay="0"/>
+                                          </p:stCondLst>
+                                        </p:cTn>
+                                        <p:tgtEl>
+                                          <p:spTgt spid="35843">
+                                            <p:txEl>
+                                              <p:pRg st="3" end="3"/>
+                                            </p:txEl>
+                                          </p:spTgt>
+                                        </p:tgtEl>
+                                        <p:attrNameLst>
+                                          <p:attrName>style.visibility</p:attrName>
+                                        </p:attrNameLst>
+                                      </p:cBhvr>
+                                      <p:to>
+                                        <p:strVal val="visible"/>
+                                      </p:to>
+                                    </p:set>
+                                  </p:childTnLst>
+                                </p:cTn>
+                              </p:par>
+                              <p:par>
+                                <p:cTn id="17" presetID="1" presetClass="entr" presetSubtype="0" fill="hold" grpId="0" nodeType="withEffect">
+                                  <p:stCondLst>
+                                    <p:cond delay="0"/>
+                                  </p:stCondLst>
+                                  <p:childTnLst>
+                                    <p:set>
+                                      <p:cBhvr>
+                                        <p:cTn id="18" dur="1" fill="hold">
                                           <p:stCondLst>
                                             <p:cond delay="0"/>
                                           </p:stCondLst>
                                         </p:cTn>
                                         <p:tgtEl>
                                           <p:spTgt spid="2"/>
+                                        </p:tgtEl>
+                                        <p:attrNameLst>
+                                          <p:attrName>style.visibility</p:attrName>
+                                        </p:attrNameLst>
+                                      </p:cBhvr>
+                                      <p:to>
+                                        <p:strVal val="visible"/>
+                                      </p:to>
+                                    </p:set>
+                                  </p:childTnLst>
+                                </p:cTn>
+                              </p:par>
+                              <p:par>
+                                <p:cTn id="19" presetID="1" presetClass="entr" presetSubtype="0" fill="hold" nodeType="withEffect">
+                                  <p:stCondLst>
+                                    <p:cond delay="0"/>
+                                  </p:stCondLst>
+                                  <p:childTnLst>
+                                    <p:set>
+                                      <p:cBhvr>
+                                        <p:cTn id="20" dur="1" fill="hold">
+                                          <p:stCondLst>
+                                            <p:cond delay="0"/>
+                                          </p:stCondLst>
+                                        </p:cTn>
+                                        <p:tgtEl>
+                                          <p:spTgt spid="4"/>
                                         </p:tgtEl>
                                         <p:attrNameLst>
                                           <p:attrName>style.visibility</p:attrName>
@@ -14204,26 +14656,26 @@
                     </p:cTn>
                   </p:par>
                   <p:par>
-                    <p:cTn id="9" fill="hold">
+                    <p:cTn id="21" fill="hold">
                       <p:stCondLst>
                         <p:cond delay="indefinite"/>
                       </p:stCondLst>
                       <p:childTnLst>
                         <p:par>
-                          <p:cTn id="10" fill="hold">
+                          <p:cTn id="22" fill="hold">
                             <p:stCondLst>
                               <p:cond delay="0"/>
                             </p:stCondLst>
                             <p:childTnLst>
                               <p:par>
-                                <p:cTn id="11" presetID="1" presetClass="entr" presetSubtype="0" fill="hold" grpId="0" nodeType="clickEffect">
+                                <p:cTn id="23" presetID="1" presetClass="entr" presetSubtype="0" fill="hold" grpId="0" nodeType="clickEffect">
                                   <p:stCondLst>
                                     <p:cond delay="0"/>
                                   </p:stCondLst>
                                   <p:childTnLst>
                                     <p:set>
                                       <p:cBhvr>
-                                        <p:cTn id="12" dur="1" fill="hold">
+                                        <p:cTn id="24" dur="1" fill="hold">
                                           <p:stCondLst>
                                             <p:cond delay="0"/>
                                           </p:stCondLst>
@@ -14270,6 +14722,7 @@
       </p:par>
     </p:tnLst>
     <p:bldLst>
+      <p:bldP spid="35843" grpId="0" uiExpand="1" build="p"/>
       <p:bldP spid="2" grpId="0"/>
       <p:bldP spid="10" grpId="0" animBg="1"/>
     </p:bldLst>
@@ -15117,8 +15570,8 @@
           </a:p>
         </p:txBody>
       </p:sp>
-      <mc:AlternateContent xmlns:mc="http://schemas.openxmlformats.org/markup-compatibility/2006" xmlns:a14="http://schemas.microsoft.com/office/drawing/2010/main">
-        <mc:Choice Requires="a14">
+      <mc:AlternateContent xmlns:mc="http://schemas.openxmlformats.org/markup-compatibility/2006">
+        <mc:Choice xmlns:a14="http://schemas.microsoft.com/office/drawing/2010/main" Requires="a14">
           <p:sp>
             <p:nvSpPr>
               <p:cNvPr id="3" name="Content Placeholder 2">
@@ -15143,7 +15596,7 @@
             </p:spPr>
             <p:txBody>
               <a:bodyPr>
-                <a:normAutofit fontScale="70000" lnSpcReduction="20000"/>
+                <a:normAutofit fontScale="62500" lnSpcReduction="20000"/>
               </a:bodyPr>
               <a:lstStyle/>
               <a:p>
@@ -15169,7 +15622,7 @@
                       <a:srgbClr val="FF0000"/>
                     </a:solidFill>
                   </a:rPr>
-                  <a:t>maximizing a function</a:t>
+                  <a:t>maximizing a utility function</a:t>
                 </a:r>
                 <a:r>
                   <a:rPr lang="en-US" sz="2800" dirty="0"/>
@@ -15179,7 +15632,7 @@
               <a:p>
                 <a:r>
                   <a:rPr lang="en-US" sz="2800" dirty="0"/>
-                  <a:t> Optimizers often prefer to state problems as </a:t>
+                  <a:t>Optimizers often prefer to state problems as </a:t>
                 </a:r>
                 <a:r>
                   <a:rPr lang="en-US" sz="2800" b="1" dirty="0">
@@ -15191,7 +15644,27 @@
                 </a:r>
                 <a:r>
                   <a:rPr lang="en-US" sz="2800" dirty="0"/>
-                  <a:t> problems and refer to hill climbing as </a:t>
+                  <a:t> problems to reduce </a:t>
+                </a:r>
+                <a:r>
+                  <a:rPr lang="en-US" sz="2800" b="1" dirty="0">
+                    <a:solidFill>
+                      <a:srgbClr val="FF0000"/>
+                    </a:solidFill>
+                  </a:rPr>
+                  <a:t>cost or loss </a:t>
+                </a:r>
+                <a:r>
+                  <a:rPr lang="en-US" sz="2800" dirty="0"/>
+                  <a:t>and refer to </a:t>
+                </a:r>
+                <a:r>
+                  <a:rPr lang="en-US" dirty="0"/>
+                  <a:t>the same type of algorithm</a:t>
+                </a:r>
+                <a:r>
+                  <a:rPr lang="en-US" sz="2800" dirty="0"/>
+                  <a:t> as </a:t>
                 </a:r>
                 <a:r>
                   <a:rPr lang="en-US" sz="2800" b="1" dirty="0">
@@ -15261,7 +15734,7 @@
                           </m:dPr>
                           <m:e>
                             <m:r>
-                              <a:rPr lang="en-US" sz="3600" i="1">
+                              <a:rPr lang="en-US" sz="3600" i="1" smtClean="0">
                                 <a:latin typeface="Cambria Math" panose="02040503050406030204" pitchFamily="18" charset="0"/>
                               </a:rPr>
                               <m:t>𝑓</m:t>
@@ -15391,7 +15864,7 @@
             </p:txBody>
           </p:sp>
         </mc:Choice>
-        <mc:Fallback xmlns="">
+        <mc:Fallback>
           <p:sp>
             <p:nvSpPr>
               <p:cNvPr id="3" name="Content Placeholder 2">
@@ -15416,7 +15889,7 @@
               <a:blipFill>
                 <a:blip r:embed="rId2"/>
                 <a:stretch>
-                  <a:fillRect l="-696" t="-5621"/>
+                  <a:fillRect l="-464" t="-5030"/>
                 </a:stretch>
               </a:blipFill>
             </p:spPr>
@@ -16528,9 +17001,9 @@
         <p:grpSpPr>
           <a:xfrm>
             <a:off x="1141882" y="2629303"/>
-            <a:ext cx="6478118" cy="3771497"/>
+            <a:ext cx="7011510" cy="3771497"/>
             <a:chOff x="837082" y="2476903"/>
-            <a:chExt cx="7049617" cy="4217029"/>
+            <a:chExt cx="7630065" cy="4217029"/>
           </a:xfrm>
         </p:grpSpPr>
         <p:sp>
@@ -16942,13 +17415,13 @@
           </p:nvSpPr>
           <p:spPr>
             <a:xfrm>
-              <a:off x="5896565" y="2480521"/>
-              <a:ext cx="1990134" cy="567487"/>
+              <a:off x="5896564" y="2480521"/>
+              <a:ext cx="2570583" cy="567487"/>
             </a:xfrm>
             <a:prstGeom prst="wedgeRectCallout">
               <a:avLst>
-                <a:gd name="adj1" fmla="val -87023"/>
-                <a:gd name="adj2" fmla="val 109126"/>
+                <a:gd name="adj1" fmla="val -74904"/>
+                <a:gd name="adj2" fmla="val 108284"/>
               </a:avLst>
             </a:prstGeom>
           </p:spPr>
@@ -16975,7 +17448,7 @@
               <a:pPr algn="ctr"/>
               <a:r>
                 <a:rPr lang="en-US" dirty="0"/>
-                <a:t>“bad” local move</a:t>
+                <a:t>Initial “bad” local move</a:t>
               </a:r>
             </a:p>
           </p:txBody>
@@ -17420,8 +17893,8 @@
           </a:p>
         </p:txBody>
       </p:sp>
-      <mc:AlternateContent xmlns:mc="http://schemas.openxmlformats.org/markup-compatibility/2006" xmlns:a14="http://schemas.microsoft.com/office/drawing/2010/main">
-        <mc:Choice Requires="a14">
+      <mc:AlternateContent xmlns:mc="http://schemas.openxmlformats.org/markup-compatibility/2006">
+        <mc:Choice xmlns:a14="http://schemas.microsoft.com/office/drawing/2010/main" Requires="a14">
           <p:sp>
             <p:nvSpPr>
               <p:cNvPr id="38915" name="Rectangle 3"/>
@@ -17481,7 +17954,7 @@
               <a:p>
                 <a:r>
                   <a:rPr lang="en-US" sz="2400" dirty="0"/>
-                  <a:t> The probability of accepting “bad” moves follows the annealing schedule, which reduces the temperature </a:t>
+                  <a:t>The probability of accepting “bad” moves follows the annealing schedule, which reduces the temperature </a:t>
                 </a:r>
                 <a14:m>
                   <m:oMath xmlns:m="http://schemas.openxmlformats.org/officeDocument/2006/math">
@@ -17527,7 +18000,7 @@
             </p:txBody>
           </p:sp>
         </mc:Choice>
-        <mc:Fallback xmlns="">
+        <mc:Fallback>
           <p:sp>
             <p:nvSpPr>
               <p:cNvPr id="38915" name="Rectangle 3"/>
@@ -17546,7 +18019,7 @@
               <a:blipFill>
                 <a:blip r:embed="rId3"/>
                 <a:stretch>
-                  <a:fillRect l="-370" t="-5814" r="-667"/>
+                  <a:fillRect l="-370" t="-5814" r="-74"/>
                 </a:stretch>
               </a:blipFill>
             </p:spPr>
@@ -17928,8 +18401,8 @@
             </a:p>
           </p:txBody>
         </p:sp>
-        <mc:AlternateContent xmlns:mc="http://schemas.openxmlformats.org/markup-compatibility/2006" xmlns:a14="http://schemas.microsoft.com/office/drawing/2010/main">
-          <mc:Choice Requires="a14">
+        <mc:AlternateContent xmlns:mc="http://schemas.openxmlformats.org/markup-compatibility/2006">
+          <mc:Choice xmlns:a14="http://schemas.microsoft.com/office/drawing/2010/main" Requires="a14">
             <p:sp>
               <p:nvSpPr>
                 <p:cNvPr id="12" name="TextBox 11">
@@ -17944,7 +18417,7 @@
               </p:nvSpPr>
               <p:spPr>
                 <a:xfrm>
-                  <a:off x="1524000" y="5225270"/>
+                  <a:off x="1504949" y="5181600"/>
                   <a:ext cx="1390651" cy="283743"/>
                 </a:xfrm>
                 <a:prstGeom prst="rect">
@@ -18011,7 +18484,7 @@
               </p:txBody>
             </p:sp>
           </mc:Choice>
-          <mc:Fallback xmlns="">
+          <mc:Fallback>
             <p:sp>
               <p:nvSpPr>
                 <p:cNvPr id="12" name="TextBox 11">
@@ -18028,7 +18501,7 @@
               </p:nvSpPr>
               <p:spPr>
                 <a:xfrm>
-                  <a:off x="1524000" y="5225270"/>
+                  <a:off x="1504949" y="5181600"/>
                   <a:ext cx="1390651" cy="283743"/>
                 </a:xfrm>
                 <a:prstGeom prst="rect">
@@ -18037,7 +18510,7 @@
                 <a:blipFill>
                   <a:blip r:embed="rId6"/>
                   <a:stretch>
-                    <a:fillRect l="-9211" t="-25532" r="-7895" b="-34043"/>
+                    <a:fillRect l="-9649" t="-25532" r="-7895" b="-31915"/>
                   </a:stretch>
                 </a:blipFill>
               </p:spPr>
@@ -18672,8 +19145,8 @@
           </a:p>
         </p:txBody>
       </p:sp>
-      <mc:AlternateContent xmlns:mc="http://schemas.openxmlformats.org/markup-compatibility/2006">
-        <mc:Choice xmlns:a14="http://schemas.microsoft.com/office/drawing/2010/main" Requires="a14">
+      <mc:AlternateContent xmlns:mc="http://schemas.openxmlformats.org/markup-compatibility/2006" xmlns:a14="http://schemas.microsoft.com/office/drawing/2010/main">
+        <mc:Choice Requires="a14">
           <p:sp>
             <p:nvSpPr>
               <p:cNvPr id="3" name="Content Placeholder 2">
@@ -19557,7 +20030,7 @@
             </p:txBody>
           </p:sp>
         </mc:Choice>
-        <mc:Fallback>
+        <mc:Fallback xmlns="">
           <p:sp>
             <p:nvSpPr>
               <p:cNvPr id="3" name="Content Placeholder 2">

--- a/slides/04_local_search.pptx
+++ b/slides/04_local_search.pptx
@@ -3108,7 +3108,7 @@
             <a:fld id="{46E2045A-045A-4BC7-A4D3-1395440B1C3D}" type="datetimeFigureOut">
               <a:rPr lang="en-US" smtClean="0"/>
               <a:pPr/>
-              <a:t>2/27/2026</a:t>
+              <a:t>3/4/2026</a:t>
             </a:fld>
             <a:endParaRPr lang="en-US"/>
           </a:p>
@@ -9980,8 +9980,8 @@
           </a:p>
         </p:txBody>
       </p:sp>
-      <mc:AlternateContent xmlns:mc="http://schemas.openxmlformats.org/markup-compatibility/2006">
-        <mc:Choice xmlns:a14="http://schemas.microsoft.com/office/drawing/2010/main" Requires="a14">
+      <mc:AlternateContent xmlns:mc="http://schemas.openxmlformats.org/markup-compatibility/2006" xmlns:a14="http://schemas.microsoft.com/office/drawing/2010/main">
+        <mc:Choice Requires="a14">
           <p:sp>
             <p:nvSpPr>
               <p:cNvPr id="7" name="Rectangle 3">
@@ -10405,7 +10405,7 @@
             </p:txBody>
           </p:sp>
         </mc:Choice>
-        <mc:Fallback>
+        <mc:Fallback xmlns="">
           <p:sp>
             <p:nvSpPr>
               <p:cNvPr id="7" name="Rectangle 3">
@@ -11610,8 +11610,8 @@
           </a:p>
         </p:txBody>
       </p:sp>
-      <mc:AlternateContent xmlns:mc="http://schemas.openxmlformats.org/markup-compatibility/2006">
-        <mc:Choice xmlns:a14="http://schemas.microsoft.com/office/drawing/2010/main" Requires="a14">
+      <mc:AlternateContent xmlns:mc="http://schemas.openxmlformats.org/markup-compatibility/2006" xmlns:a14="http://schemas.microsoft.com/office/drawing/2010/main">
+        <mc:Choice Requires="a14">
           <p:sp>
             <p:nvSpPr>
               <p:cNvPr id="3" name="Content Placeholder 2">
@@ -11837,7 +11837,7 @@
             </p:txBody>
           </p:sp>
         </mc:Choice>
-        <mc:Fallback>
+        <mc:Fallback xmlns="">
           <p:sp>
             <p:nvSpPr>
               <p:cNvPr id="3" name="Content Placeholder 2">
@@ -12619,8 +12619,8 @@
           </a:p>
         </p:txBody>
       </p:sp>
-      <mc:AlternateContent xmlns:mc="http://schemas.openxmlformats.org/markup-compatibility/2006">
-        <mc:Choice xmlns:a14="http://schemas.microsoft.com/office/drawing/2010/main" Requires="a14">
+      <mc:AlternateContent xmlns:mc="http://schemas.openxmlformats.org/markup-compatibility/2006" xmlns:a14="http://schemas.microsoft.com/office/drawing/2010/main">
+        <mc:Choice Requires="a14">
           <p:sp>
             <p:nvSpPr>
               <p:cNvPr id="4" name="Content Placeholder 3">
@@ -12783,7 +12783,7 @@
             </p:txBody>
           </p:sp>
         </mc:Choice>
-        <mc:Fallback>
+        <mc:Fallback xmlns="">
           <p:sp>
             <p:nvSpPr>
               <p:cNvPr id="4" name="Content Placeholder 3">
@@ -13268,8 +13268,8 @@
           </mc:Fallback>
         </mc:AlternateContent>
       </p:grpSp>
-      <mc:AlternateContent xmlns:mc="http://schemas.openxmlformats.org/markup-compatibility/2006">
-        <mc:Choice xmlns:a14="http://schemas.microsoft.com/office/drawing/2010/main" Requires="a14">
+      <mc:AlternateContent xmlns:mc="http://schemas.openxmlformats.org/markup-compatibility/2006" xmlns:a14="http://schemas.microsoft.com/office/drawing/2010/main">
+        <mc:Choice Requires="a14">
           <p:sp>
             <p:nvSpPr>
               <p:cNvPr id="12" name="Speech Bubble: Rectangle with Corners Rounded 11">
@@ -13338,7 +13338,7 @@
             </p:txBody>
           </p:sp>
         </mc:Choice>
-        <mc:Fallback>
+        <mc:Fallback xmlns="">
           <p:sp>
             <p:nvSpPr>
               <p:cNvPr id="12" name="Speech Bubble: Rectangle with Corners Rounded 11">
@@ -14279,8 +14279,8 @@
           </a:p>
         </p:txBody>
       </p:sp>
-      <mc:AlternateContent xmlns:mc="http://schemas.openxmlformats.org/markup-compatibility/2006">
-        <mc:Choice xmlns:a14="http://schemas.microsoft.com/office/drawing/2010/main" Requires="a14">
+      <mc:AlternateContent xmlns:mc="http://schemas.openxmlformats.org/markup-compatibility/2006" xmlns:a14="http://schemas.microsoft.com/office/drawing/2010/main">
+        <mc:Choice Requires="a14">
           <p:sp>
             <p:nvSpPr>
               <p:cNvPr id="10" name="TextBox 9">
@@ -14362,7 +14362,7 @@
             </p:txBody>
           </p:sp>
         </mc:Choice>
-        <mc:Fallback>
+        <mc:Fallback xmlns="">
           <p:sp>
             <p:nvSpPr>
               <p:cNvPr id="10" name="TextBox 9">
@@ -15570,8 +15570,8 @@
           </a:p>
         </p:txBody>
       </p:sp>
-      <mc:AlternateContent xmlns:mc="http://schemas.openxmlformats.org/markup-compatibility/2006">
-        <mc:Choice xmlns:a14="http://schemas.microsoft.com/office/drawing/2010/main" Requires="a14">
+      <mc:AlternateContent xmlns:mc="http://schemas.openxmlformats.org/markup-compatibility/2006" xmlns:a14="http://schemas.microsoft.com/office/drawing/2010/main">
+        <mc:Choice Requires="a14">
           <p:sp>
             <p:nvSpPr>
               <p:cNvPr id="3" name="Content Placeholder 2">
@@ -15864,7 +15864,7 @@
             </p:txBody>
           </p:sp>
         </mc:Choice>
-        <mc:Fallback>
+        <mc:Fallback xmlns="">
           <p:sp>
             <p:nvSpPr>
               <p:cNvPr id="3" name="Content Placeholder 2">
@@ -17893,8 +17893,8 @@
           </a:p>
         </p:txBody>
       </p:sp>
-      <mc:AlternateContent xmlns:mc="http://schemas.openxmlformats.org/markup-compatibility/2006">
-        <mc:Choice xmlns:a14="http://schemas.microsoft.com/office/drawing/2010/main" Requires="a14">
+      <mc:AlternateContent xmlns:mc="http://schemas.openxmlformats.org/markup-compatibility/2006" xmlns:a14="http://schemas.microsoft.com/office/drawing/2010/main">
+        <mc:Choice Requires="a14">
           <p:sp>
             <p:nvSpPr>
               <p:cNvPr id="38915" name="Rectangle 3"/>
@@ -18000,7 +18000,7 @@
             </p:txBody>
           </p:sp>
         </mc:Choice>
-        <mc:Fallback>
+        <mc:Fallback xmlns="">
           <p:sp>
             <p:nvSpPr>
               <p:cNvPr id="38915" name="Rectangle 3"/>
@@ -18401,8 +18401,8 @@
             </a:p>
           </p:txBody>
         </p:sp>
-        <mc:AlternateContent xmlns:mc="http://schemas.openxmlformats.org/markup-compatibility/2006">
-          <mc:Choice xmlns:a14="http://schemas.microsoft.com/office/drawing/2010/main" Requires="a14">
+        <mc:AlternateContent xmlns:mc="http://schemas.openxmlformats.org/markup-compatibility/2006" xmlns:a14="http://schemas.microsoft.com/office/drawing/2010/main">
+          <mc:Choice Requires="a14">
             <p:sp>
               <p:nvSpPr>
                 <p:cNvPr id="12" name="TextBox 11">
@@ -18484,7 +18484,7 @@
               </p:txBody>
             </p:sp>
           </mc:Choice>
-          <mc:Fallback>
+          <mc:Fallback xmlns="">
             <p:sp>
               <p:nvSpPr>
                 <p:cNvPr id="12" name="TextBox 11">
@@ -27928,19 +27928,31 @@
         <p:spPr/>
         <p:txBody>
           <a:bodyPr anchor="ctr">
-            <a:normAutofit/>
+            <a:normAutofit fontScale="92500" lnSpcReduction="10000"/>
           </a:bodyPr>
           <a:lstStyle/>
           <a:p>
             <a:r>
+              <a:rPr lang="en-US" sz="2000" b="1" dirty="0"/>
+              <a:t>Issue</a:t>
+            </a:r>
+            <a:r>
               <a:rPr lang="en-US" sz="2000" dirty="0"/>
-              <a:t>What if the mathematical formulation of the objective function is not known?</a:t>
+              <a:t>: What if the mathematical formulation of the objective function is not known? </a:t>
+            </a:r>
+            <a:r>
+              <a:rPr lang="en-US" sz="2000" b="1" dirty="0"/>
+              <a:t>We cannot find an equation for the gradient!</a:t>
             </a:r>
           </a:p>
           <a:p>
             <a:r>
+              <a:rPr lang="en-US" sz="2000" b="1" dirty="0"/>
+              <a:t>Idea</a:t>
+            </a:r>
+            <a:r>
               <a:rPr lang="en-US" sz="2000" dirty="0"/>
-              <a:t>We may have objective values at fixed points, called the </a:t>
+              <a:t>: We may have objective function values at fixed points, called the </a:t>
             </a:r>
             <a:r>
               <a:rPr lang="en-US" sz="2000" b="1" dirty="0"/>
@@ -27948,20 +27960,60 @@
             </a:r>
             <a:r>
               <a:rPr lang="en-US" sz="2000" dirty="0"/>
-              <a:t>.</a:t>
+              <a:t>. Can we approximate the gradient?</a:t>
             </a:r>
           </a:p>
           <a:p>
             <a:r>
+              <a:rPr lang="en-US" sz="2000" b="1" dirty="0"/>
+              <a:t>Remember</a:t>
+            </a:r>
+            <a:r>
               <a:rPr lang="en-US" sz="2000" dirty="0"/>
-              <a:t>In this case, we can perform gradient descent with an approximation of the gradient using the data points as a sample. This is called </a:t>
+              <a:t>: Stochastic hill climbing uses random local moves. If the training data are a </a:t>
+            </a:r>
+            <a:r>
+              <a:rPr lang="en-US" sz="2000" b="1" dirty="0"/>
+              <a:t>random sample</a:t>
+            </a:r>
+            <a:r>
+              <a:rPr lang="en-US" sz="2000" dirty="0"/>
+              <a:t>, then we can use some of them to </a:t>
+            </a:r>
+            <a:r>
+              <a:rPr lang="en-US" sz="2000" b="1" dirty="0"/>
+              <a:t>approximate the gradient</a:t>
+            </a:r>
+            <a:r>
+              <a:rPr lang="en-US" sz="2000" dirty="0"/>
+              <a:t>. </a:t>
+            </a:r>
+          </a:p>
+          <a:p>
+            <a:endParaRPr lang="en-US" sz="2000" dirty="0"/>
+          </a:p>
+          <a:p>
+            <a:r>
+              <a:rPr lang="en-US" sz="2000" b="1" dirty="0"/>
+              <a:t>Algorithm</a:t>
+            </a:r>
+            <a:r>
+              <a:rPr lang="en-US" sz="2000" dirty="0"/>
+              <a:t>: The resulting algorithm is called </a:t>
             </a:r>
             <a:r>
               <a:rPr lang="en-US" sz="2000" b="1" dirty="0"/>
               <a:t>stochastic gradient descent (SGD). </a:t>
             </a:r>
+            <a:r>
+              <a:rPr lang="en-US" sz="2000" dirty="0"/>
+              <a:t>It is called stochastic because it uses a random sample (the training data) to decide on the next local move.</a:t>
+            </a:r>
           </a:p>
           <a:p>
+            <a:pPr marL="0" indent="0">
+              <a:buNone/>
+            </a:pPr>
             <a:endParaRPr lang="en-US" sz="2000" dirty="0"/>
           </a:p>
           <a:p>
@@ -27976,7 +28028,7 @@
             </a:r>
             <a:r>
               <a:rPr lang="en-US" sz="2000" dirty="0"/>
-              <a:t>We will talk more about search in continuous spaces with loss functions using gradient descent when we discuss </a:t>
+              <a:t>We will discuss search in continuous spaces with loss functions using gradient descent when we discuss </a:t>
             </a:r>
             <a:r>
               <a:rPr lang="en-US" sz="2000" b="1" dirty="0"/>
@@ -27995,6 +28047,284 @@
   <p:clrMapOvr>
     <a:masterClrMapping/>
   </p:clrMapOvr>
+  <p:timing>
+    <p:tnLst>
+      <p:par>
+        <p:cTn id="1" dur="indefinite" restart="never" nodeType="tmRoot">
+          <p:childTnLst>
+            <p:seq concurrent="1" nextAc="seek">
+              <p:cTn id="2" dur="indefinite" nodeType="mainSeq">
+                <p:childTnLst>
+                  <p:par>
+                    <p:cTn id="3" fill="hold">
+                      <p:stCondLst>
+                        <p:cond delay="indefinite"/>
+                      </p:stCondLst>
+                      <p:childTnLst>
+                        <p:par>
+                          <p:cTn id="4" fill="hold">
+                            <p:stCondLst>
+                              <p:cond delay="0"/>
+                            </p:stCondLst>
+                            <p:childTnLst>
+                              <p:par>
+                                <p:cTn id="5" presetID="1" presetClass="entr" presetSubtype="0" fill="hold" grpId="0" nodeType="clickEffect">
+                                  <p:stCondLst>
+                                    <p:cond delay="0"/>
+                                  </p:stCondLst>
+                                  <p:childTnLst>
+                                    <p:set>
+                                      <p:cBhvr>
+                                        <p:cTn id="6" dur="1" fill="hold">
+                                          <p:stCondLst>
+                                            <p:cond delay="0"/>
+                                          </p:stCondLst>
+                                        </p:cTn>
+                                        <p:tgtEl>
+                                          <p:spTgt spid="3">
+                                            <p:txEl>
+                                              <p:pRg st="0" end="0"/>
+                                            </p:txEl>
+                                          </p:spTgt>
+                                        </p:tgtEl>
+                                        <p:attrNameLst>
+                                          <p:attrName>style.visibility</p:attrName>
+                                        </p:attrNameLst>
+                                      </p:cBhvr>
+                                      <p:to>
+                                        <p:strVal val="visible"/>
+                                      </p:to>
+                                    </p:set>
+                                  </p:childTnLst>
+                                </p:cTn>
+                              </p:par>
+                            </p:childTnLst>
+                          </p:cTn>
+                        </p:par>
+                      </p:childTnLst>
+                    </p:cTn>
+                  </p:par>
+                  <p:par>
+                    <p:cTn id="7" fill="hold">
+                      <p:stCondLst>
+                        <p:cond delay="indefinite"/>
+                      </p:stCondLst>
+                      <p:childTnLst>
+                        <p:par>
+                          <p:cTn id="8" fill="hold">
+                            <p:stCondLst>
+                              <p:cond delay="0"/>
+                            </p:stCondLst>
+                            <p:childTnLst>
+                              <p:par>
+                                <p:cTn id="9" presetID="1" presetClass="entr" presetSubtype="0" fill="hold" grpId="0" nodeType="clickEffect">
+                                  <p:stCondLst>
+                                    <p:cond delay="0"/>
+                                  </p:stCondLst>
+                                  <p:childTnLst>
+                                    <p:set>
+                                      <p:cBhvr>
+                                        <p:cTn id="10" dur="1" fill="hold">
+                                          <p:stCondLst>
+                                            <p:cond delay="0"/>
+                                          </p:stCondLst>
+                                        </p:cTn>
+                                        <p:tgtEl>
+                                          <p:spTgt spid="3">
+                                            <p:txEl>
+                                              <p:pRg st="1" end="1"/>
+                                            </p:txEl>
+                                          </p:spTgt>
+                                        </p:tgtEl>
+                                        <p:attrNameLst>
+                                          <p:attrName>style.visibility</p:attrName>
+                                        </p:attrNameLst>
+                                      </p:cBhvr>
+                                      <p:to>
+                                        <p:strVal val="visible"/>
+                                      </p:to>
+                                    </p:set>
+                                  </p:childTnLst>
+                                </p:cTn>
+                              </p:par>
+                            </p:childTnLst>
+                          </p:cTn>
+                        </p:par>
+                      </p:childTnLst>
+                    </p:cTn>
+                  </p:par>
+                  <p:par>
+                    <p:cTn id="11" fill="hold">
+                      <p:stCondLst>
+                        <p:cond delay="indefinite"/>
+                      </p:stCondLst>
+                      <p:childTnLst>
+                        <p:par>
+                          <p:cTn id="12" fill="hold">
+                            <p:stCondLst>
+                              <p:cond delay="0"/>
+                            </p:stCondLst>
+                            <p:childTnLst>
+                              <p:par>
+                                <p:cTn id="13" presetID="1" presetClass="entr" presetSubtype="0" fill="hold" grpId="0" nodeType="clickEffect">
+                                  <p:stCondLst>
+                                    <p:cond delay="0"/>
+                                  </p:stCondLst>
+                                  <p:childTnLst>
+                                    <p:set>
+                                      <p:cBhvr>
+                                        <p:cTn id="14" dur="1" fill="hold">
+                                          <p:stCondLst>
+                                            <p:cond delay="0"/>
+                                          </p:stCondLst>
+                                        </p:cTn>
+                                        <p:tgtEl>
+                                          <p:spTgt spid="3">
+                                            <p:txEl>
+                                              <p:pRg st="2" end="2"/>
+                                            </p:txEl>
+                                          </p:spTgt>
+                                        </p:tgtEl>
+                                        <p:attrNameLst>
+                                          <p:attrName>style.visibility</p:attrName>
+                                        </p:attrNameLst>
+                                      </p:cBhvr>
+                                      <p:to>
+                                        <p:strVal val="visible"/>
+                                      </p:to>
+                                    </p:set>
+                                  </p:childTnLst>
+                                </p:cTn>
+                              </p:par>
+                            </p:childTnLst>
+                          </p:cTn>
+                        </p:par>
+                      </p:childTnLst>
+                    </p:cTn>
+                  </p:par>
+                  <p:par>
+                    <p:cTn id="15" fill="hold">
+                      <p:stCondLst>
+                        <p:cond delay="indefinite"/>
+                      </p:stCondLst>
+                      <p:childTnLst>
+                        <p:par>
+                          <p:cTn id="16" fill="hold">
+                            <p:stCondLst>
+                              <p:cond delay="0"/>
+                            </p:stCondLst>
+                            <p:childTnLst>
+                              <p:par>
+                                <p:cTn id="17" presetID="1" presetClass="entr" presetSubtype="0" fill="hold" grpId="0" nodeType="clickEffect">
+                                  <p:stCondLst>
+                                    <p:cond delay="0"/>
+                                  </p:stCondLst>
+                                  <p:childTnLst>
+                                    <p:set>
+                                      <p:cBhvr>
+                                        <p:cTn id="18" dur="1" fill="hold">
+                                          <p:stCondLst>
+                                            <p:cond delay="0"/>
+                                          </p:stCondLst>
+                                        </p:cTn>
+                                        <p:tgtEl>
+                                          <p:spTgt spid="3">
+                                            <p:txEl>
+                                              <p:pRg st="4" end="4"/>
+                                            </p:txEl>
+                                          </p:spTgt>
+                                        </p:tgtEl>
+                                        <p:attrNameLst>
+                                          <p:attrName>style.visibility</p:attrName>
+                                        </p:attrNameLst>
+                                      </p:cBhvr>
+                                      <p:to>
+                                        <p:strVal val="visible"/>
+                                      </p:to>
+                                    </p:set>
+                                  </p:childTnLst>
+                                </p:cTn>
+                              </p:par>
+                            </p:childTnLst>
+                          </p:cTn>
+                        </p:par>
+                      </p:childTnLst>
+                    </p:cTn>
+                  </p:par>
+                  <p:par>
+                    <p:cTn id="19" fill="hold">
+                      <p:stCondLst>
+                        <p:cond delay="indefinite"/>
+                      </p:stCondLst>
+                      <p:childTnLst>
+                        <p:par>
+                          <p:cTn id="20" fill="hold">
+                            <p:stCondLst>
+                              <p:cond delay="0"/>
+                            </p:stCondLst>
+                            <p:childTnLst>
+                              <p:par>
+                                <p:cTn id="21" presetID="1" presetClass="entr" presetSubtype="0" fill="hold" grpId="0" nodeType="clickEffect">
+                                  <p:stCondLst>
+                                    <p:cond delay="0"/>
+                                  </p:stCondLst>
+                                  <p:childTnLst>
+                                    <p:set>
+                                      <p:cBhvr>
+                                        <p:cTn id="22" dur="1" fill="hold">
+                                          <p:stCondLst>
+                                            <p:cond delay="0"/>
+                                          </p:stCondLst>
+                                        </p:cTn>
+                                        <p:tgtEl>
+                                          <p:spTgt spid="3">
+                                            <p:txEl>
+                                              <p:pRg st="6" end="6"/>
+                                            </p:txEl>
+                                          </p:spTgt>
+                                        </p:tgtEl>
+                                        <p:attrNameLst>
+                                          <p:attrName>style.visibility</p:attrName>
+                                        </p:attrNameLst>
+                                      </p:cBhvr>
+                                      <p:to>
+                                        <p:strVal val="visible"/>
+                                      </p:to>
+                                    </p:set>
+                                  </p:childTnLst>
+                                </p:cTn>
+                              </p:par>
+                            </p:childTnLst>
+                          </p:cTn>
+                        </p:par>
+                      </p:childTnLst>
+                    </p:cTn>
+                  </p:par>
+                </p:childTnLst>
+              </p:cTn>
+              <p:prevCondLst>
+                <p:cond evt="onPrev" delay="0">
+                  <p:tgtEl>
+                    <p:sldTgt/>
+                  </p:tgtEl>
+                </p:cond>
+              </p:prevCondLst>
+              <p:nextCondLst>
+                <p:cond evt="onNext" delay="0">
+                  <p:tgtEl>
+                    <p:sldTgt/>
+                  </p:tgtEl>
+                </p:cond>
+              </p:nextCondLst>
+            </p:seq>
+          </p:childTnLst>
+        </p:cTn>
+      </p:par>
+    </p:tnLst>
+    <p:bldLst>
+      <p:bldP spid="3" grpId="0" build="p"/>
+    </p:bldLst>
+  </p:timing>
 </p:sld>
 </file>
 
